--- a/curso/pptx/S51.pptx
+++ b/curso/pptx/S51.pptx
@@ -6696,7 +6696,7 @@
                 </a:solidFill>
                 <a:latin typeface="Nunito Sans"/>
               </a:rPr>
-              <a:t>Recomendar:</a:t>
+              <a:t>推荐：</a:t>
             </a:r>
             <a:r>
               <a:rPr sz="2800" b="0">
@@ -6705,7 +6705,7 @@
                 </a:solidFill>
                 <a:latin typeface="Nunito Sans"/>
               </a:rPr>
-              <a:t> te cuenta lo que le gusta, sin acuerdo con la marca</a:t>
+              <a:t>他告诉你自己喜欢什么，和品牌没有合作</a:t>
             </a:r>
           </a:p>
           <a:p>
@@ -6730,7 +6730,7 @@
                 </a:solidFill>
                 <a:latin typeface="Nunito Sans"/>
               </a:rPr>
-              <a:t>Vender:</a:t>
+              <a:t>卖货：</a:t>
             </a:r>
             <a:r>
               <a:rPr sz="2800" b="0">
@@ -6739,7 +6739,7 @@
                 </a:solidFill>
                 <a:latin typeface="Nunito Sans"/>
               </a:rPr>
-              <a:t> una marca le paga, o le da algo, por enseñarlo</a:t>
+              <a:t>品牌付钱给他，或送他东西，让他展示产品</a:t>
             </a:r>
           </a:p>
           <a:p>
@@ -6764,7 +6764,7 @@
                 </a:solidFill>
                 <a:latin typeface="Nunito Sans"/>
               </a:rPr>
-              <a:t>A simple vista, muchas veces no se ve la diferencia</a:t>
+              <a:t>乍一看，往往看不出区别</a:t>
             </a:r>
           </a:p>
         </p:txBody>
@@ -6998,7 +6998,7 @@
                 </a:solidFill>
                 <a:latin typeface="Nunito Sans"/>
               </a:rPr>
-              <a:t>Parece el consejo de un amigo</a:t>
+              <a:t>看起来像朋友的建议</a:t>
             </a:r>
           </a:p>
           <a:p>
@@ -7023,7 +7023,7 @@
                 </a:solidFill>
                 <a:latin typeface="Nunito Sans"/>
               </a:rPr>
-              <a:t>Por eso bajamos la guardia</a:t>
+              <a:t>所以我们放下了戒心</a:t>
             </a:r>
           </a:p>
           <a:p>
@@ -7048,7 +7048,7 @@
                 </a:solidFill>
                 <a:latin typeface="Nunito Sans"/>
               </a:rPr>
-              <a:t>En España, la publicidad debe identificarse como publicidad</a:t>
+              <a:t>在西班牙，广告必须标明是广告</a:t>
             </a:r>
           </a:p>
         </p:txBody>
@@ -7239,7 +7239,7 @@
                 </a:solidFill>
                 <a:latin typeface="Nunito Sans"/>
               </a:rPr>
-              <a:t>Etiquetas como </a:t>
+              <a:t>清晰可见的标签，如 </a:t>
             </a:r>
             <a:r>
               <a:rPr sz="2800" b="1">
@@ -7257,7 +7257,7 @@
                 </a:solidFill>
                 <a:latin typeface="Nunito Sans"/>
               </a:rPr>
-              <a:t> o </a:t>
+              <a:t> 或 </a:t>
             </a:r>
             <a:r>
               <a:rPr sz="2800" b="1">
@@ -7267,15 +7267,6 @@
                 <a:latin typeface="Nunito Sans"/>
               </a:rPr>
               <a:t>#ad</a:t>
-            </a:r>
-            <a:r>
-              <a:rPr sz="2800" b="0">
-                <a:solidFill>
-                  <a:srgbClr val="1F2A44"/>
-                </a:solidFill>
-                <a:latin typeface="Nunito Sans"/>
-              </a:rPr>
-              <a:t>, bien visibles</a:t>
             </a:r>
           </a:p>
           <a:p>
@@ -7300,7 +7291,7 @@
                 </a:solidFill>
                 <a:latin typeface="Nunito Sans"/>
               </a:rPr>
-              <a:t>La palabra «publicidad» en el mensaje</a:t>
+              <a:t>信息中出现“广告”这个词</a:t>
             </a:r>
           </a:p>
           <a:p>
@@ -7325,7 +7316,7 @@
                 </a:solidFill>
                 <a:latin typeface="Nunito Sans"/>
               </a:rPr>
-              <a:t>La etiqueta de la propia red: «colaboración pagada»</a:t>
+              <a:t>平台自带的标签：“付费合作”</a:t>
             </a:r>
           </a:p>
           <a:p>
@@ -7350,7 +7341,7 @@
                 </a:solidFill>
                 <a:latin typeface="Nunito Sans"/>
               </a:rPr>
-              <a:t>Un código de descuento suele indicar un acuerdo con la marca</a:t>
+              <a:t>折扣码通常说明与品牌有合作</a:t>
             </a:r>
           </a:p>
         </p:txBody>

--- a/curso/pptx/S51.pptx
+++ b/curso/pptx/S51.pptx
@@ -4436,7 +4436,7 @@
                 </a:solidFill>
                 <a:latin typeface="Nunito Sans"/>
               </a:rPr>
-              <a:t>陈（Chen）关注了一位看起来像她朋友的女主播：她讲自己的烦恼，回复评论，还说“你们是我的家人”。后来她开始推广能量饮料。</a:t>
+              <a:t>一个男孩关注了一位像朋友一样的女主播：她讲自己的烦恼，回复评论，还说“你们是我的家人”。后来她开始推广能量饮料。</a:t>
             </a:r>
           </a:p>
         </p:txBody>
@@ -4484,7 +4484,7 @@
                 </a:solidFill>
                 <a:latin typeface="Nunito Sans"/>
               </a:rPr>
-              <a:t>为什么有效？陈像相信朋友一样相信她。</a:t>
+              <a:t>为什么有效？这个男孩像相信朋友一样相信她。</a:t>
             </a:r>
           </a:p>
           <a:p>
